--- a/manual.pptx
+++ b/manual.pptx
@@ -6517,8 +6517,8 @@
         </p:nvSpPr>
         <p:spPr>
           <a:xfrm>
-            <a:off x="685800" y="3611880"/>
-            <a:ext cx="10835640" cy="1417320"/>
+            <a:off x="685800" y="3566160"/>
+            <a:ext cx="10835640" cy="1691640"/>
           </a:xfrm>
           <a:prstGeom prst="roundRect">
             <a:avLst>
@@ -6572,8 +6572,8 @@
         </p:nvSpPr>
         <p:spPr>
           <a:xfrm>
-            <a:off x="896112" y="3749039"/>
-            <a:ext cx="10424160" cy="1188720"/>
+            <a:off x="896112" y="3675887"/>
+            <a:ext cx="10424160" cy="1508760"/>
           </a:xfrm>
           <a:prstGeom prst="rect">
             <a:avLst/>
@@ -6598,7 +6598,7 @@
                 </a:solidFill>
                 <a:latin typeface="Calibri"/>
               </a:rPr>
-              <a:t>✉️  Regra de envio</a:t>
+              <a:t>✉️  Regra de envio — toda decisão é enviada, sempre</a:t>
             </a:r>
           </a:p>
           <a:p>
@@ -6607,25 +6607,44 @@
                 <a:spcPct val="115000"/>
               </a:lnSpc>
               <a:spcAft>
-                <a:spcPts val="400"/>
+                <a:spcPts val="600"/>
+              </a:spcAft>
+            </a:pPr>
+            <a:r>
+              <a:rPr sz="1150" b="1" i="0">
+                <a:solidFill>
+                  <a:srgbClr val="C0392B"/>
+                </a:solidFill>
+                <a:latin typeface="Calibri"/>
+              </a:rPr>
+              <a:t>"Envio para o Cliente" decide só PRA QUEM vai — nunca SE vai. Não existe reporte sem envio.</a:t>
+            </a:r>
+          </a:p>
+          <a:p>
+            <a:pPr algn="l">
+              <a:lnSpc>
+                <a:spcPct val="110000"/>
+              </a:lnSpc>
+              <a:spcAft>
+                <a:spcPts val="300"/>
               </a:spcAft>
               <a:buFont typeface="Calibri"/>
               <a:buChar char="—"/>
             </a:pPr>
             <a:r>
-              <a:rPr sz="1150" b="0" i="0">
+              <a:rPr sz="1100" b="0" i="0">
                 <a:solidFill>
                   <a:srgbClr val="2D2926"/>
                 </a:solidFill>
                 <a:latin typeface="Calibri"/>
               </a:rPr>
-              <a:t>  Envio para o Cliente = Sim  →  Higor Viali + Maria Muller (+ Shana, se "Inserir Gerência" = Sim) — cc Grupo Bridgestone</a:t>
+              <a:t>  Sim  →  Higor Viali + Maria Muller (+ Shana, se "Inserir Gerência" = Sim) — cc Grupo Bridgestone</a:t>
             </a:r>
           </a:p>
           <a:p>
             <a:pPr algn="l">
               <a:lnSpc>
-                <a:spcPct val="115000"/>
+                <a:spcPct val="110000"/>
               </a:lnSpc>
               <a:spcAft>
                 <a:spcPts val="0"/>
@@ -6634,13 +6653,13 @@
               <a:buChar char="—"/>
             </a:pPr>
             <a:r>
-              <a:rPr sz="1150" b="0" i="0">
+              <a:rPr sz="1100" b="0" i="0">
                 <a:solidFill>
                   <a:srgbClr val="2D2926"/>
                 </a:solidFill>
                 <a:latin typeface="Calibri"/>
               </a:rPr>
-              <a:t>  Envio para o Cliente = Não  →  fica só interno, vai só pro Grupo Bridgestone</a:t>
+              <a:t>  Não  →  fica só interno, vai só pro Grupo Bridgestone (mas ainda é enviado)</a:t>
             </a:r>
           </a:p>
         </p:txBody>
@@ -6653,8 +6672,8 @@
         </p:nvSpPr>
         <p:spPr>
           <a:xfrm>
-            <a:off x="685800" y="5212080"/>
-            <a:ext cx="10835640" cy="868680"/>
+            <a:off x="685800" y="5440680"/>
+            <a:ext cx="10835640" cy="777240"/>
           </a:xfrm>
           <a:prstGeom prst="roundRect">
             <a:avLst>
@@ -6699,8 +6718,8 @@
         </p:nvSpPr>
         <p:spPr>
           <a:xfrm>
-            <a:off x="886968" y="5303520"/>
-            <a:ext cx="10433304" cy="685800"/>
+            <a:off x="886968" y="5532120"/>
+            <a:ext cx="10433304" cy="594359"/>
           </a:xfrm>
           <a:prstGeom prst="rect">
             <a:avLst/>
@@ -6719,7 +6738,7 @@
               </a:lnSpc>
             </a:pPr>
             <a:r>
-              <a:rPr sz="1150">
+              <a:rPr sz="1100">
                 <a:solidFill>
                   <a:srgbClr val="C0392B"/>
                 </a:solidFill>

--- a/manual.pptx
+++ b/manual.pptx
@@ -12,6 +12,8 @@
     <p:sldId id="260" r:id="rId11"/>
     <p:sldId id="261" r:id="rId12"/>
     <p:sldId id="262" r:id="rId13"/>
+    <p:sldId id="265" r:id="rId16"/>
+    <p:sldId id="266" r:id="rId17"/>
     <p:sldId id="263" r:id="rId14"/>
     <p:sldId id="264" r:id="rId15"/>
   </p:sldIdLst>
@@ -3488,6 +3490,1481 @@
 </p:sld>
 </file>
 
+<file path=ppt/slides/slide10.xml><?xml version="1.0" encoding="utf-8"?>
+<p:sld xmlns:a="http://schemas.openxmlformats.org/drawingml/2006/main" xmlns:p="http://schemas.openxmlformats.org/presentationml/2006/main" xmlns:r="http://schemas.openxmlformats.org/officeDocument/2006/relationships">
+  <p:cSld>
+    <p:spTree>
+      <p:nvGrpSpPr>
+        <p:cNvPr id="1" name=""/>
+        <p:cNvGrpSpPr/>
+        <p:nvPr/>
+      </p:nvGrpSpPr>
+      <p:grpSpPr/>
+      <p:sp>
+        <p:nvSpPr>
+          <p:cNvPr id="2" name="Rectangle 1"/>
+          <p:cNvSpPr/>
+          <p:nvPr/>
+        </p:nvSpPr>
+        <p:spPr>
+          <a:xfrm>
+            <a:off x="0" y="0"/>
+            <a:ext cx="12191695" cy="1234440"/>
+          </a:xfrm>
+          <a:prstGeom prst="rect">
+            <a:avLst/>
+          </a:prstGeom>
+          <a:solidFill>
+            <a:srgbClr val="003B5C"/>
+          </a:solidFill>
+          <a:ln>
+            <a:noFill/>
+          </a:ln>
+          <a:effectLst/>
+        </p:spPr>
+        <p:style>
+          <a:lnRef idx="1">
+            <a:schemeClr val="accent1"/>
+          </a:lnRef>
+          <a:fillRef idx="3">
+            <a:schemeClr val="accent1"/>
+          </a:fillRef>
+          <a:effectRef idx="2">
+            <a:schemeClr val="accent1"/>
+          </a:effectRef>
+          <a:fontRef idx="minor">
+            <a:schemeClr val="lt1"/>
+          </a:fontRef>
+        </p:style>
+        <p:txBody>
+          <a:bodyPr rtlCol="0" anchor="ctr"/>
+          <a:lstStyle/>
+          <a:p>
+            <a:pPr algn="ctr"/>
+          </a:p>
+        </p:txBody>
+      </p:sp>
+      <p:sp>
+        <p:nvSpPr>
+          <p:cNvPr id="3" name="Oval 2"/>
+          <p:cNvSpPr/>
+          <p:nvPr/>
+        </p:nvSpPr>
+        <p:spPr>
+          <a:xfrm>
+            <a:off x="502920" y="233172"/>
+            <a:ext cx="768096" cy="768096"/>
+          </a:xfrm>
+          <a:prstGeom prst="ellipse">
+            <a:avLst/>
+          </a:prstGeom>
+          <a:solidFill>
+            <a:srgbClr val="00A9E0"/>
+          </a:solidFill>
+          <a:ln>
+            <a:noFill/>
+          </a:ln>
+          <a:effectLst/>
+        </p:spPr>
+        <p:style>
+          <a:lnRef idx="1">
+            <a:schemeClr val="accent1"/>
+          </a:lnRef>
+          <a:fillRef idx="3">
+            <a:schemeClr val="accent1"/>
+          </a:fillRef>
+          <a:effectRef idx="2">
+            <a:schemeClr val="accent1"/>
+          </a:effectRef>
+          <a:fontRef idx="minor">
+            <a:schemeClr val="lt1"/>
+          </a:fontRef>
+        </p:style>
+        <p:txBody>
+          <a:bodyPr rtlCol="0" anchor="ctr"/>
+          <a:lstStyle/>
+          <a:p>
+            <a:pPr algn="ctr"/>
+            <a:r>
+              <a:rPr sz="3000" b="1">
+                <a:solidFill>
+                  <a:srgbClr val="FFFFFF"/>
+                </a:solidFill>
+                <a:latin typeface="Calibri"/>
+              </a:rPr>
+              <a:t>🤖</a:t>
+            </a:r>
+          </a:p>
+        </p:txBody>
+      </p:sp>
+      <p:sp>
+        <p:nvSpPr>
+          <p:cNvPr id="4" name="TextBox 3"/>
+          <p:cNvSpPr txBox="1"/>
+          <p:nvPr/>
+        </p:nvSpPr>
+        <p:spPr>
+          <a:xfrm>
+            <a:off x="1508760" y="114300"/>
+            <a:ext cx="10058400" cy="822960"/>
+          </a:xfrm>
+          <a:prstGeom prst="rect">
+            <a:avLst/>
+          </a:prstGeom>
+          <a:noFill/>
+        </p:spPr>
+        <p:txBody>
+          <a:bodyPr wrap="square">
+            <a:spAutoFit/>
+          </a:bodyPr>
+          <a:lstStyle/>
+          <a:p>
+            <a:r>
+              <a:rPr sz="2600" b="1">
+                <a:solidFill>
+                  <a:srgbClr val="FFFFFF"/>
+                </a:solidFill>
+                <a:latin typeface="Calibri"/>
+              </a:rPr>
+              <a:t>Lançamento IA — Extração de Valores</a:t>
+            </a:r>
+          </a:p>
+          <a:p>
+            <a:r>
+              <a:rPr sz="1250" b="0">
+                <a:solidFill>
+                  <a:srgbClr val="BFE1F2"/>
+                </a:solidFill>
+                <a:latin typeface="Calibri"/>
+              </a:rPr>
+              <a:t>Ferramenta de apoio pra montar a grade de verbas antes da Inserção de Valores</a:t>
+            </a:r>
+          </a:p>
+        </p:txBody>
+      </p:sp>
+      <p:sp>
+        <p:nvSpPr>
+          <p:cNvPr id="5" name="Rounded Rectangle 4"/>
+          <p:cNvSpPr/>
+          <p:nvPr/>
+        </p:nvSpPr>
+        <p:spPr>
+          <a:xfrm>
+            <a:off x="685800" y="1600200"/>
+            <a:ext cx="3706560" cy="2377440"/>
+          </a:xfrm>
+          <a:prstGeom prst="roundRect">
+            <a:avLst/>
+          </a:prstGeom>
+          <a:solidFill>
+            <a:srgbClr val="ECF3F7"/>
+          </a:solidFill>
+          <a:ln>
+            <a:noFill/>
+          </a:ln>
+          <a:effectLst/>
+        </p:spPr>
+        <p:style>
+          <a:lnRef idx="1">
+            <a:schemeClr val="accent1"/>
+          </a:lnRef>
+          <a:fillRef idx="3">
+            <a:schemeClr val="accent1"/>
+          </a:fillRef>
+          <a:effectRef idx="2">
+            <a:schemeClr val="accent1"/>
+          </a:effectRef>
+          <a:fontRef idx="minor">
+            <a:schemeClr val="lt1"/>
+          </a:fontRef>
+        </p:style>
+        <p:txBody>
+          <a:bodyPr rtlCol="0" anchor="ctr"/>
+          <a:lstStyle/>
+          <a:p>
+            <a:pPr algn="ctr"/>
+          </a:p>
+        </p:txBody>
+      </p:sp>
+      <p:sp>
+        <p:nvSpPr>
+          <p:cNvPr id="6" name="TextBox 5"/>
+          <p:cNvSpPr txBox="1"/>
+          <p:nvPr/>
+        </p:nvSpPr>
+        <p:spPr>
+          <a:xfrm>
+            <a:off x="868680" y="1783080"/>
+            <a:ext cx="3340800" cy="2011680"/>
+          </a:xfrm>
+          <a:prstGeom prst="rect">
+            <a:avLst/>
+          </a:prstGeom>
+          <a:noFill/>
+        </p:spPr>
+        <p:txBody>
+          <a:bodyPr wrap="square">
+            <a:spAutoFit/>
+          </a:bodyPr>
+          <a:lstStyle/>
+          <a:p>
+            <a:r>
+              <a:rPr sz="1500" b="1">
+                <a:solidFill>
+                  <a:srgbClr val="003B5C"/>
+                </a:solidFill>
+                <a:latin typeface="Calibri"/>
+              </a:rPr>
+              <a:t>📤  Upload</a:t>
+            </a:r>
+          </a:p>
+          <a:p>
+            <a:r>
+              <a:rPr sz="1200" b="0">
+                <a:solidFill>
+                  <a:srgbClr val="2D2926"/>
+                </a:solidFill>
+                <a:latin typeface="Calibri"/>
+              </a:rPr>
+              <a:t>PDF, XLSX ou TXT — ou cole o texto direto. Nada aqui é salvo automaticamente no banco de dados.</a:t>
+            </a:r>
+          </a:p>
+        </p:txBody>
+      </p:sp>
+      <p:sp>
+        <p:nvSpPr>
+          <p:cNvPr id="7" name="Rounded Rectangle 6"/>
+          <p:cNvSpPr/>
+          <p:nvPr/>
+        </p:nvSpPr>
+        <p:spPr>
+          <a:xfrm>
+            <a:off x="4483800" y="1600200"/>
+            <a:ext cx="3706560" cy="2377440"/>
+          </a:xfrm>
+          <a:prstGeom prst="roundRect">
+            <a:avLst/>
+          </a:prstGeom>
+          <a:solidFill>
+            <a:srgbClr val="ECF3F7"/>
+          </a:solidFill>
+          <a:ln>
+            <a:noFill/>
+          </a:ln>
+          <a:effectLst/>
+        </p:spPr>
+        <p:style>
+          <a:lnRef idx="1">
+            <a:schemeClr val="accent1"/>
+          </a:lnRef>
+          <a:fillRef idx="3">
+            <a:schemeClr val="accent1"/>
+          </a:fillRef>
+          <a:effectRef idx="2">
+            <a:schemeClr val="accent1"/>
+          </a:effectRef>
+          <a:fontRef idx="minor">
+            <a:schemeClr val="lt1"/>
+          </a:fontRef>
+        </p:style>
+        <p:txBody>
+          <a:bodyPr rtlCol="0" anchor="ctr"/>
+          <a:lstStyle/>
+          <a:p>
+            <a:pPr algn="ctr"/>
+          </a:p>
+        </p:txBody>
+      </p:sp>
+      <p:sp>
+        <p:nvSpPr>
+          <p:cNvPr id="8" name="TextBox 7"/>
+          <p:cNvSpPr txBox="1"/>
+          <p:nvPr/>
+        </p:nvSpPr>
+        <p:spPr>
+          <a:xfrm>
+            <a:off x="4666680" y="1783080"/>
+            <a:ext cx="3340800" cy="2011680"/>
+          </a:xfrm>
+          <a:prstGeom prst="rect">
+            <a:avLst/>
+          </a:prstGeom>
+          <a:noFill/>
+        </p:spPr>
+        <p:txBody>
+          <a:bodyPr wrap="square">
+            <a:spAutoFit/>
+          </a:bodyPr>
+          <a:lstStyle/>
+          <a:p>
+            <a:r>
+              <a:rPr sz="1500" b="1">
+                <a:solidFill>
+                  <a:srgbClr val="003B5C"/>
+                </a:solidFill>
+                <a:latin typeface="Calibri"/>
+              </a:rPr>
+              <a:t>📍  Leitura por posição</a:t>
+            </a:r>
+          </a:p>
+          <a:p>
+            <a:r>
+              <a:rPr sz="1200" b="0">
+                <a:solidFill>
+                  <a:srgbClr val="2D2926"/>
+                </a:solidFill>
+                <a:latin typeface="Calibri"/>
+              </a:rPr>
+              <a:t>Via pdf.js: reconstrói a tabela pela posição real de cada texto — funciona até em PDFs rotacionados (comum nos cálculos PJe-Calc da MADI).</a:t>
+            </a:r>
+          </a:p>
+        </p:txBody>
+      </p:sp>
+      <p:sp>
+        <p:nvSpPr>
+          <p:cNvPr id="9" name="Rounded Rectangle 8"/>
+          <p:cNvSpPr/>
+          <p:nvPr/>
+        </p:nvSpPr>
+        <p:spPr>
+          <a:xfrm>
+            <a:off x="8281800" y="1600200"/>
+            <a:ext cx="3706560" cy="2377440"/>
+          </a:xfrm>
+          <a:prstGeom prst="roundRect">
+            <a:avLst/>
+          </a:prstGeom>
+          <a:solidFill>
+            <a:srgbClr val="ECF3F7"/>
+          </a:solidFill>
+          <a:ln>
+            <a:noFill/>
+          </a:ln>
+          <a:effectLst/>
+        </p:spPr>
+        <p:style>
+          <a:lnRef idx="1">
+            <a:schemeClr val="accent1"/>
+          </a:lnRef>
+          <a:fillRef idx="3">
+            <a:schemeClr val="accent1"/>
+          </a:fillRef>
+          <a:effectRef idx="2">
+            <a:schemeClr val="accent1"/>
+          </a:effectRef>
+          <a:fontRef idx="minor">
+            <a:schemeClr val="lt1"/>
+          </a:fontRef>
+        </p:style>
+        <p:txBody>
+          <a:bodyPr rtlCol="0" anchor="ctr"/>
+          <a:lstStyle/>
+          <a:p>
+            <a:pPr algn="ctr"/>
+          </a:p>
+        </p:txBody>
+      </p:sp>
+      <p:sp>
+        <p:nvSpPr>
+          <p:cNvPr id="10" name="TextBox 9"/>
+          <p:cNvSpPr txBox="1"/>
+          <p:nvPr/>
+        </p:nvSpPr>
+        <p:spPr>
+          <a:xfrm>
+            <a:off x="8464680" y="1783080"/>
+            <a:ext cx="3340800" cy="2011680"/>
+          </a:xfrm>
+          <a:prstGeom prst="rect">
+            <a:avLst/>
+          </a:prstGeom>
+          <a:noFill/>
+        </p:spPr>
+        <p:txBody>
+          <a:bodyPr wrap="square">
+            <a:spAutoFit/>
+          </a:bodyPr>
+          <a:lstStyle/>
+          <a:p>
+            <a:r>
+              <a:rPr sz="1500" b="1">
+                <a:solidFill>
+                  <a:srgbClr val="003B5C"/>
+                </a:solidFill>
+                <a:latin typeface="Calibri"/>
+              </a:rPr>
+              <a:t>🔤  Busca por palavra-chave</a:t>
+            </a:r>
+          </a:p>
+          <a:p>
+            <a:r>
+              <a:rPr sz="1200" b="0">
+                <a:solidFill>
+                  <a:srgbClr val="2D2926"/>
+                </a:solidFill>
+                <a:latin typeface="Calibri"/>
+              </a:rPr>
+              <a:t>Reserva: usada quando o documento não tem a estrutura de tabela padrão (texto colado, XLSX, PDF fora do padrão).</a:t>
+            </a:r>
+          </a:p>
+        </p:txBody>
+      </p:sp>
+      <p:sp>
+        <p:nvSpPr>
+          <p:cNvPr id="11" name="Rounded Rectangle 10"/>
+          <p:cNvSpPr/>
+          <p:nvPr/>
+        </p:nvSpPr>
+        <p:spPr>
+          <a:xfrm>
+            <a:off x="685800" y="4297680"/>
+            <a:ext cx="10835640" cy="1691640"/>
+          </a:xfrm>
+          <a:prstGeom prst="roundRect">
+            <a:avLst/>
+          </a:prstGeom>
+          <a:solidFill>
+            <a:srgbClr val="E3F6FC"/>
+          </a:solidFill>
+          <a:ln>
+            <a:noFill/>
+          </a:ln>
+          <a:effectLst/>
+        </p:spPr>
+        <p:style>
+          <a:lnRef idx="1">
+            <a:schemeClr val="accent1"/>
+          </a:lnRef>
+          <a:fillRef idx="3">
+            <a:schemeClr val="accent1"/>
+          </a:fillRef>
+          <a:effectRef idx="2">
+            <a:schemeClr val="accent1"/>
+          </a:effectRef>
+          <a:fontRef idx="minor">
+            <a:schemeClr val="lt1"/>
+          </a:fontRef>
+        </p:style>
+        <p:txBody>
+          <a:bodyPr rtlCol="0" anchor="ctr"/>
+          <a:lstStyle/>
+          <a:p>
+            <a:pPr algn="ctr"/>
+          </a:p>
+        </p:txBody>
+      </p:sp>
+      <p:sp>
+        <p:nvSpPr>
+          <p:cNvPr id="12" name="TextBox 11"/>
+          <p:cNvSpPr txBox="1"/>
+          <p:nvPr/>
+        </p:nvSpPr>
+        <p:spPr>
+          <a:xfrm>
+            <a:off x="710184" y="4322064"/>
+            <a:ext cx="10786872" cy="1642872"/>
+          </a:xfrm>
+          <a:prstGeom prst="rect">
+            <a:avLst/>
+          </a:prstGeom>
+          <a:noFill/>
+        </p:spPr>
+        <p:txBody>
+          <a:bodyPr wrap="square">
+            <a:spAutoFit/>
+          </a:bodyPr>
+          <a:lstStyle/>
+          <a:p>
+            <a:r>
+              <a:rPr sz="1500" b="1">
+                <a:solidFill>
+                  <a:srgbClr val="003B5C"/>
+                </a:solidFill>
+                <a:latin typeface="Calibri"/>
+              </a:rPr>
+              <a:t>📎  Débitos com terceiros não somam no Histórico</a:t>
+            </a:r>
+          </a:p>
+          <a:p>
+            <a:r>
+              <a:rPr sz="1200" b="0">
+                <a:solidFill>
+                  <a:srgbClr val="2D2926"/>
+                </a:solidFill>
+                <a:latin typeface="Calibri"/>
+              </a:rPr>
+              <a:t>  Honorários periciais, honorários do patrono do reclamante e contribuição social ao INSS são mostrados numa caixa separada, só de referência.</a:t>
+            </a:r>
+          </a:p>
+          <a:p>
+            <a:r>
+              <a:rPr sz="1200" b="0">
+                <a:solidFill>
+                  <a:srgbClr val="2D2926"/>
+                </a:solidFill>
+                <a:latin typeface="Calibri"/>
+              </a:rPr>
+              <a:t>  São devidos a terceiros (perito, advogado, INSS), não ao reclamante — por isso ficam fora de todas as somas (Histórico, Provisão e Accrual).</a:t>
+            </a:r>
+          </a:p>
+        </p:txBody>
+      </p:sp>
+      <p:sp>
+        <p:nvSpPr>
+          <p:cNvPr id="13" name="TextBox 12"/>
+          <p:cNvSpPr txBox="1"/>
+          <p:nvPr/>
+        </p:nvSpPr>
+        <p:spPr>
+          <a:xfrm>
+            <a:off x="502920" y="6473952"/>
+            <a:ext cx="7315200" cy="292608"/>
+          </a:xfrm>
+          <a:prstGeom prst="rect">
+            <a:avLst/>
+          </a:prstGeom>
+          <a:noFill/>
+        </p:spPr>
+        <p:txBody>
+          <a:bodyPr wrap="none">
+            <a:spAutoFit/>
+          </a:bodyPr>
+          <a:lstStyle/>
+          <a:p>
+            <a:r>
+              <a:rPr sz="900">
+                <a:solidFill>
+                  <a:srgbClr val="5F7E92"/>
+                </a:solidFill>
+                <a:latin typeface="Calibri"/>
+              </a:rPr>
+              <a:t>LAWgico — Comunicações Bridgestone · Peixoto &amp; Cury Advogados</a:t>
+            </a:r>
+          </a:p>
+        </p:txBody>
+      </p:sp>
+      <p:sp>
+        <p:nvSpPr>
+          <p:cNvPr id="14" name="TextBox 13"/>
+          <p:cNvSpPr txBox="1"/>
+          <p:nvPr/>
+        </p:nvSpPr>
+        <p:spPr>
+          <a:xfrm>
+            <a:off x="8991295" y="6473952"/>
+            <a:ext cx="2743200" cy="292608"/>
+          </a:xfrm>
+          <a:prstGeom prst="rect">
+            <a:avLst/>
+          </a:prstGeom>
+          <a:noFill/>
+        </p:spPr>
+        <p:txBody>
+          <a:bodyPr wrap="none">
+            <a:spAutoFit/>
+          </a:bodyPr>
+          <a:lstStyle/>
+          <a:p>
+            <a:pPr algn="r"/>
+            <a:r>
+              <a:rPr sz="900">
+                <a:solidFill>
+                  <a:srgbClr val="5F7E92"/>
+                </a:solidFill>
+                <a:latin typeface="Calibri"/>
+              </a:rPr>
+              <a:t>8 / 11</a:t>
+            </a:r>
+          </a:p>
+        </p:txBody>
+      </p:sp>
+    </p:spTree>
+  </p:cSld>
+  <p:clrMapOvr>
+    <a:masterClrMapping/>
+  </p:clrMapOvr>
+</p:sld>
+</file>
+
+<file path=ppt/slides/slide11.xml><?xml version="1.0" encoding="utf-8"?>
+<p:sld xmlns:a="http://schemas.openxmlformats.org/drawingml/2006/main" xmlns:p="http://schemas.openxmlformats.org/presentationml/2006/main" xmlns:r="http://schemas.openxmlformats.org/officeDocument/2006/relationships">
+  <p:cSld>
+    <p:spTree>
+      <p:nvGrpSpPr>
+        <p:cNvPr id="1" name=""/>
+        <p:cNvGrpSpPr/>
+        <p:nvPr/>
+      </p:nvGrpSpPr>
+      <p:grpSpPr/>
+      <p:sp>
+        <p:nvSpPr>
+          <p:cNvPr id="2" name="Rectangle 1"/>
+          <p:cNvSpPr/>
+          <p:nvPr/>
+        </p:nvSpPr>
+        <p:spPr>
+          <a:xfrm>
+            <a:off x="0" y="0"/>
+            <a:ext cx="12191695" cy="1234440"/>
+          </a:xfrm>
+          <a:prstGeom prst="rect">
+            <a:avLst/>
+          </a:prstGeom>
+          <a:solidFill>
+            <a:srgbClr val="003B5C"/>
+          </a:solidFill>
+          <a:ln>
+            <a:noFill/>
+          </a:ln>
+          <a:effectLst/>
+        </p:spPr>
+        <p:style>
+          <a:lnRef idx="1">
+            <a:schemeClr val="accent1"/>
+          </a:lnRef>
+          <a:fillRef idx="3">
+            <a:schemeClr val="accent1"/>
+          </a:fillRef>
+          <a:effectRef idx="2">
+            <a:schemeClr val="accent1"/>
+          </a:effectRef>
+          <a:fontRef idx="minor">
+            <a:schemeClr val="lt1"/>
+          </a:fontRef>
+        </p:style>
+        <p:txBody>
+          <a:bodyPr rtlCol="0" anchor="ctr"/>
+          <a:lstStyle/>
+          <a:p>
+            <a:pPr algn="ctr"/>
+          </a:p>
+        </p:txBody>
+      </p:sp>
+      <p:sp>
+        <p:nvSpPr>
+          <p:cNvPr id="3" name="Oval 2"/>
+          <p:cNvSpPr/>
+          <p:nvPr/>
+        </p:nvSpPr>
+        <p:spPr>
+          <a:xfrm>
+            <a:off x="502920" y="233172"/>
+            <a:ext cx="768096" cy="768096"/>
+          </a:xfrm>
+          <a:prstGeom prst="ellipse">
+            <a:avLst/>
+          </a:prstGeom>
+          <a:solidFill>
+            <a:srgbClr val="00A9E0"/>
+          </a:solidFill>
+          <a:ln>
+            <a:noFill/>
+          </a:ln>
+          <a:effectLst/>
+        </p:spPr>
+        <p:style>
+          <a:lnRef idx="1">
+            <a:schemeClr val="accent1"/>
+          </a:lnRef>
+          <a:fillRef idx="3">
+            <a:schemeClr val="accent1"/>
+          </a:fillRef>
+          <a:effectRef idx="2">
+            <a:schemeClr val="accent1"/>
+          </a:effectRef>
+          <a:fontRef idx="minor">
+            <a:schemeClr val="lt1"/>
+          </a:fontRef>
+        </p:style>
+        <p:txBody>
+          <a:bodyPr rtlCol="0" anchor="ctr"/>
+          <a:lstStyle/>
+          <a:p>
+            <a:pPr algn="ctr"/>
+            <a:r>
+              <a:rPr sz="3000" b="1">
+                <a:solidFill>
+                  <a:srgbClr val="FFFFFF"/>
+                </a:solidFill>
+                <a:latin typeface="Calibri"/>
+              </a:rPr>
+              <a:t>🤖</a:t>
+            </a:r>
+          </a:p>
+        </p:txBody>
+      </p:sp>
+      <p:sp>
+        <p:nvSpPr>
+          <p:cNvPr id="4" name="TextBox 3"/>
+          <p:cNvSpPr txBox="1"/>
+          <p:nvPr/>
+        </p:nvSpPr>
+        <p:spPr>
+          <a:xfrm>
+            <a:off x="1508760" y="114300"/>
+            <a:ext cx="10058400" cy="822960"/>
+          </a:xfrm>
+          <a:prstGeom prst="rect">
+            <a:avLst/>
+          </a:prstGeom>
+          <a:noFill/>
+        </p:spPr>
+        <p:txBody>
+          <a:bodyPr wrap="square">
+            <a:spAutoFit/>
+          </a:bodyPr>
+          <a:lstStyle/>
+          <a:p>
+            <a:r>
+              <a:rPr sz="2600" b="1">
+                <a:solidFill>
+                  <a:srgbClr val="FFFFFF"/>
+                </a:solidFill>
+                <a:latin typeface="Calibri"/>
+              </a:rPr>
+              <a:t>Lançamento IA — Histórico, Provisão e Accrual</a:t>
+            </a:r>
+          </a:p>
+          <a:p>
+            <a:r>
+              <a:rPr sz="1250" b="0">
+                <a:solidFill>
+                  <a:srgbClr val="BFE1F2"/>
+                </a:solidFill>
+                <a:latin typeface="Calibri"/>
+              </a:rPr>
+              <a:t>O que o botão → Levar para Inserção de Valores calcula</a:t>
+            </a:r>
+          </a:p>
+        </p:txBody>
+      </p:sp>
+      <p:sp>
+        <p:nvSpPr>
+          <p:cNvPr id="5" name="Oval 4"/>
+          <p:cNvSpPr/>
+          <p:nvPr/>
+        </p:nvSpPr>
+        <p:spPr>
+          <a:xfrm>
+            <a:off x="685800" y="1600200"/>
+            <a:ext cx="457200" cy="457200"/>
+          </a:xfrm>
+          <a:prstGeom prst="ellipse">
+            <a:avLst/>
+          </a:prstGeom>
+          <a:solidFill>
+            <a:srgbClr val="003B5C"/>
+          </a:solidFill>
+          <a:ln>
+            <a:noFill/>
+          </a:ln>
+          <a:effectLst/>
+        </p:spPr>
+        <p:style>
+          <a:lnRef idx="1">
+            <a:schemeClr val="accent1"/>
+          </a:lnRef>
+          <a:fillRef idx="3">
+            <a:schemeClr val="accent1"/>
+          </a:fillRef>
+          <a:effectRef idx="2">
+            <a:schemeClr val="accent1"/>
+          </a:effectRef>
+          <a:fontRef idx="minor">
+            <a:schemeClr val="lt1"/>
+          </a:fontRef>
+        </p:style>
+        <p:txBody>
+          <a:bodyPr rtlCol="0" anchor="ctr"/>
+          <a:lstStyle/>
+          <a:p>
+            <a:pPr algn="ctr"/>
+            <a:r>
+              <a:rPr sz="1700" b="1">
+                <a:solidFill>
+                  <a:srgbClr val="FFFFFF"/>
+                </a:solidFill>
+                <a:latin typeface="Calibri"/>
+              </a:rPr>
+              <a:t>1</a:t>
+            </a:r>
+          </a:p>
+        </p:txBody>
+      </p:sp>
+      <p:sp>
+        <p:nvSpPr>
+          <p:cNvPr id="6" name="TextBox 5"/>
+          <p:cNvSpPr txBox="1"/>
+          <p:nvPr/>
+        </p:nvSpPr>
+        <p:spPr>
+          <a:xfrm>
+            <a:off x="685800" y="2194560"/>
+            <a:ext cx="3611880" cy="1188720"/>
+          </a:xfrm>
+          <a:prstGeom prst="rect">
+            <a:avLst/>
+          </a:prstGeom>
+          <a:noFill/>
+        </p:spPr>
+        <p:txBody>
+          <a:bodyPr wrap="square">
+            <a:spAutoFit/>
+          </a:bodyPr>
+          <a:lstStyle/>
+          <a:p>
+            <a:r>
+              <a:rPr sz="1500" b="1">
+                <a:solidFill>
+                  <a:srgbClr val="003B5C"/>
+                </a:solidFill>
+                <a:latin typeface="Calibri"/>
+              </a:rPr>
+              <a:t>Histórico</a:t>
+            </a:r>
+          </a:p>
+          <a:p>
+            <a:r>
+              <a:rPr sz="1200" b="0">
+                <a:solidFill>
+                  <a:srgbClr val="2D2926"/>
+                </a:solidFill>
+                <a:latin typeface="Calibri"/>
+              </a:rPr>
+              <a:t>Soma do Principal de todas as verbas — valor na data da distribuição, sem correção nem juros.</a:t>
+            </a:r>
+          </a:p>
+        </p:txBody>
+      </p:sp>
+      <p:sp>
+        <p:nvSpPr>
+          <p:cNvPr id="7" name="Oval 6"/>
+          <p:cNvSpPr/>
+          <p:nvPr/>
+        </p:nvSpPr>
+        <p:spPr>
+          <a:xfrm>
+            <a:off x="4434840" y="1600200"/>
+            <a:ext cx="457200" cy="457200"/>
+          </a:xfrm>
+          <a:prstGeom prst="ellipse">
+            <a:avLst/>
+          </a:prstGeom>
+          <a:solidFill>
+            <a:srgbClr val="003B5C"/>
+          </a:solidFill>
+          <a:ln>
+            <a:noFill/>
+          </a:ln>
+          <a:effectLst/>
+        </p:spPr>
+        <p:style>
+          <a:lnRef idx="1">
+            <a:schemeClr val="accent1"/>
+          </a:lnRef>
+          <a:fillRef idx="3">
+            <a:schemeClr val="accent1"/>
+          </a:fillRef>
+          <a:effectRef idx="2">
+            <a:schemeClr val="accent1"/>
+          </a:effectRef>
+          <a:fontRef idx="minor">
+            <a:schemeClr val="lt1"/>
+          </a:fontRef>
+        </p:style>
+        <p:txBody>
+          <a:bodyPr rtlCol="0" anchor="ctr"/>
+          <a:lstStyle/>
+          <a:p>
+            <a:pPr algn="ctr"/>
+            <a:r>
+              <a:rPr sz="1700" b="1">
+                <a:solidFill>
+                  <a:srgbClr val="FFFFFF"/>
+                </a:solidFill>
+                <a:latin typeface="Calibri"/>
+              </a:rPr>
+              <a:t>2</a:t>
+            </a:r>
+          </a:p>
+        </p:txBody>
+      </p:sp>
+      <p:sp>
+        <p:nvSpPr>
+          <p:cNvPr id="8" name="TextBox 7"/>
+          <p:cNvSpPr txBox="1"/>
+          <p:nvPr/>
+        </p:nvSpPr>
+        <p:spPr>
+          <a:xfrm>
+            <a:off x="4434840" y="2194560"/>
+            <a:ext cx="3611880" cy="1188720"/>
+          </a:xfrm>
+          <a:prstGeom prst="rect">
+            <a:avLst/>
+          </a:prstGeom>
+          <a:noFill/>
+        </p:spPr>
+        <p:txBody>
+          <a:bodyPr wrap="square">
+            <a:spAutoFit/>
+          </a:bodyPr>
+          <a:lstStyle/>
+          <a:p>
+            <a:r>
+              <a:rPr sz="1500" b="1">
+                <a:solidFill>
+                  <a:srgbClr val="003B5C"/>
+                </a:solidFill>
+                <a:latin typeface="Calibri"/>
+              </a:rPr>
+              <a:t>Provisão</a:t>
+            </a:r>
+          </a:p>
+          <a:p>
+            <a:r>
+              <a:rPr sz="1200" b="0">
+                <a:solidFill>
+                  <a:srgbClr val="2D2926"/>
+                </a:solidFill>
+                <a:latin typeface="Calibri"/>
+              </a:rPr>
+              <a:t>Soma do Total de todas as verbas — valor corrigido + juros, melhor estimativa atual do passivo.</a:t>
+            </a:r>
+          </a:p>
+        </p:txBody>
+      </p:sp>
+      <p:sp>
+        <p:nvSpPr>
+          <p:cNvPr id="9" name="Oval 8"/>
+          <p:cNvSpPr/>
+          <p:nvPr/>
+        </p:nvSpPr>
+        <p:spPr>
+          <a:xfrm>
+            <a:off x="8183880" y="1600200"/>
+            <a:ext cx="457200" cy="457200"/>
+          </a:xfrm>
+          <a:prstGeom prst="ellipse">
+            <a:avLst/>
+          </a:prstGeom>
+          <a:solidFill>
+            <a:srgbClr val="003B5C"/>
+          </a:solidFill>
+          <a:ln>
+            <a:noFill/>
+          </a:ln>
+          <a:effectLst/>
+        </p:spPr>
+        <p:style>
+          <a:lnRef idx="1">
+            <a:schemeClr val="accent1"/>
+          </a:lnRef>
+          <a:fillRef idx="3">
+            <a:schemeClr val="accent1"/>
+          </a:fillRef>
+          <a:effectRef idx="2">
+            <a:schemeClr val="accent1"/>
+          </a:effectRef>
+          <a:fontRef idx="minor">
+            <a:schemeClr val="lt1"/>
+          </a:fontRef>
+        </p:style>
+        <p:txBody>
+          <a:bodyPr rtlCol="0" anchor="ctr"/>
+          <a:lstStyle/>
+          <a:p>
+            <a:pPr algn="ctr"/>
+            <a:r>
+              <a:rPr sz="1700" b="1">
+                <a:solidFill>
+                  <a:srgbClr val="FFFFFF"/>
+                </a:solidFill>
+                <a:latin typeface="Calibri"/>
+              </a:rPr>
+              <a:t>3</a:t>
+            </a:r>
+          </a:p>
+        </p:txBody>
+      </p:sp>
+      <p:sp>
+        <p:nvSpPr>
+          <p:cNvPr id="10" name="TextBox 9"/>
+          <p:cNvSpPr txBox="1"/>
+          <p:nvPr/>
+        </p:nvSpPr>
+        <p:spPr>
+          <a:xfrm>
+            <a:off x="8183880" y="2194560"/>
+            <a:ext cx="3611880" cy="1188720"/>
+          </a:xfrm>
+          <a:prstGeom prst="rect">
+            <a:avLst/>
+          </a:prstGeom>
+          <a:noFill/>
+        </p:spPr>
+        <p:txBody>
+          <a:bodyPr wrap="square">
+            <a:spAutoFit/>
+          </a:bodyPr>
+          <a:lstStyle/>
+          <a:p>
+            <a:r>
+              <a:rPr sz="1500" b="1">
+                <a:solidFill>
+                  <a:srgbClr val="003B5C"/>
+                </a:solidFill>
+                <a:latin typeface="Calibri"/>
+              </a:rPr>
+              <a:t>Accrual</a:t>
+            </a:r>
+          </a:p>
+          <a:p>
+            <a:r>
+              <a:rPr sz="1200" b="0">
+                <a:solidFill>
+                  <a:srgbClr val="2D2926"/>
+                </a:solidFill>
+                <a:latin typeface="Calibri"/>
+              </a:rPr>
+              <a:t>% da Fase do processo × soma do Principal só das verbas marcadas como Provável.</a:t>
+            </a:r>
+          </a:p>
+        </p:txBody>
+      </p:sp>
+      <p:sp>
+        <p:nvSpPr>
+          <p:cNvPr id="11" name="Rounded Rectangle 10"/>
+          <p:cNvSpPr/>
+          <p:nvPr/>
+        </p:nvSpPr>
+        <p:spPr>
+          <a:xfrm>
+            <a:off x="685800" y="3703320"/>
+            <a:ext cx="3520440" cy="1005840"/>
+          </a:xfrm>
+          <a:prstGeom prst="roundRect">
+            <a:avLst/>
+          </a:prstGeom>
+          <a:solidFill>
+            <a:srgbClr val="ECF3F7"/>
+          </a:solidFill>
+          <a:ln>
+            <a:noFill/>
+          </a:ln>
+          <a:effectLst/>
+        </p:spPr>
+        <p:style>
+          <a:lnRef idx="1">
+            <a:schemeClr val="accent1"/>
+          </a:lnRef>
+          <a:fillRef idx="3">
+            <a:schemeClr val="accent1"/>
+          </a:fillRef>
+          <a:effectRef idx="2">
+            <a:schemeClr val="accent1"/>
+          </a:effectRef>
+          <a:fontRef idx="minor">
+            <a:schemeClr val="lt1"/>
+          </a:fontRef>
+        </p:style>
+        <p:txBody>
+          <a:bodyPr rtlCol="0" anchor="ctr"/>
+          <a:lstStyle/>
+          <a:p>
+            <a:pPr algn="ctr"/>
+          </a:p>
+        </p:txBody>
+      </p:sp>
+      <p:sp>
+        <p:nvSpPr>
+          <p:cNvPr id="12" name="TextBox 11"/>
+          <p:cNvSpPr txBox="1"/>
+          <p:nvPr/>
+        </p:nvSpPr>
+        <p:spPr>
+          <a:xfrm>
+            <a:off x="868680" y="3840480"/>
+            <a:ext cx="3154680" cy="731520"/>
+          </a:xfrm>
+          <a:prstGeom prst="rect">
+            <a:avLst/>
+          </a:prstGeom>
+          <a:noFill/>
+        </p:spPr>
+        <p:txBody>
+          <a:bodyPr wrap="square">
+            <a:spAutoFit/>
+          </a:bodyPr>
+          <a:lstStyle/>
+          <a:p>
+            <a:r>
+              <a:rPr sz="1250" b="1">
+                <a:solidFill>
+                  <a:srgbClr val="003B5C"/>
+                </a:solidFill>
+                <a:latin typeface="Calibri"/>
+              </a:rPr>
+              <a:t>Fase 1 — Conhecimento e Instrução</a:t>
+            </a:r>
+          </a:p>
+          <a:p>
+            <a:r>
+              <a:rPr sz="1400" b="1">
+                <a:solidFill>
+                  <a:srgbClr val="00A9E0"/>
+                </a:solidFill>
+                <a:latin typeface="Calibri"/>
+              </a:rPr>
+              <a:t>40,5% do provável</a:t>
+            </a:r>
+          </a:p>
+        </p:txBody>
+      </p:sp>
+      <p:sp>
+        <p:nvSpPr>
+          <p:cNvPr id="13" name="Rounded Rectangle 12"/>
+          <p:cNvSpPr/>
+          <p:nvPr/>
+        </p:nvSpPr>
+        <p:spPr>
+          <a:xfrm>
+            <a:off x="4343400" y="3703320"/>
+            <a:ext cx="3520440" cy="1005840"/>
+          </a:xfrm>
+          <a:prstGeom prst="roundRect">
+            <a:avLst/>
+          </a:prstGeom>
+          <a:solidFill>
+            <a:srgbClr val="ECF3F7"/>
+          </a:solidFill>
+          <a:ln>
+            <a:noFill/>
+          </a:ln>
+          <a:effectLst/>
+        </p:spPr>
+        <p:style>
+          <a:lnRef idx="1">
+            <a:schemeClr val="accent1"/>
+          </a:lnRef>
+          <a:fillRef idx="3">
+            <a:schemeClr val="accent1"/>
+          </a:fillRef>
+          <a:effectRef idx="2">
+            <a:schemeClr val="accent1"/>
+          </a:effectRef>
+          <a:fontRef idx="minor">
+            <a:schemeClr val="lt1"/>
+          </a:fontRef>
+        </p:style>
+        <p:txBody>
+          <a:bodyPr rtlCol="0" anchor="ctr"/>
+          <a:lstStyle/>
+          <a:p>
+            <a:pPr algn="ctr"/>
+          </a:p>
+        </p:txBody>
+      </p:sp>
+      <p:sp>
+        <p:nvSpPr>
+          <p:cNvPr id="14" name="TextBox 13"/>
+          <p:cNvSpPr txBox="1"/>
+          <p:nvPr/>
+        </p:nvSpPr>
+        <p:spPr>
+          <a:xfrm>
+            <a:off x="4526280" y="3840480"/>
+            <a:ext cx="3154680" cy="731520"/>
+          </a:xfrm>
+          <a:prstGeom prst="rect">
+            <a:avLst/>
+          </a:prstGeom>
+          <a:noFill/>
+        </p:spPr>
+        <p:txBody>
+          <a:bodyPr wrap="square">
+            <a:spAutoFit/>
+          </a:bodyPr>
+          <a:lstStyle/>
+          <a:p>
+            <a:r>
+              <a:rPr sz="1250" b="1">
+                <a:solidFill>
+                  <a:srgbClr val="003B5C"/>
+                </a:solidFill>
+                <a:latin typeface="Calibri"/>
+              </a:rPr>
+              <a:t>Fase 2 — Recursal (TRT/TST)</a:t>
+            </a:r>
+          </a:p>
+          <a:p>
+            <a:r>
+              <a:rPr sz="1400" b="1">
+                <a:solidFill>
+                  <a:srgbClr val="00A9E0"/>
+                </a:solidFill>
+                <a:latin typeface="Calibri"/>
+              </a:rPr>
+              <a:t>54% do provável</a:t>
+            </a:r>
+          </a:p>
+        </p:txBody>
+      </p:sp>
+      <p:sp>
+        <p:nvSpPr>
+          <p:cNvPr id="15" name="Rounded Rectangle 14"/>
+          <p:cNvSpPr/>
+          <p:nvPr/>
+        </p:nvSpPr>
+        <p:spPr>
+          <a:xfrm>
+            <a:off x="8001000" y="3703320"/>
+            <a:ext cx="3520440" cy="1005840"/>
+          </a:xfrm>
+          <a:prstGeom prst="roundRect">
+            <a:avLst/>
+          </a:prstGeom>
+          <a:solidFill>
+            <a:srgbClr val="ECF3F7"/>
+          </a:solidFill>
+          <a:ln>
+            <a:noFill/>
+          </a:ln>
+          <a:effectLst/>
+        </p:spPr>
+        <p:style>
+          <a:lnRef idx="1">
+            <a:schemeClr val="accent1"/>
+          </a:lnRef>
+          <a:fillRef idx="3">
+            <a:schemeClr val="accent1"/>
+          </a:fillRef>
+          <a:effectRef idx="2">
+            <a:schemeClr val="accent1"/>
+          </a:effectRef>
+          <a:fontRef idx="minor">
+            <a:schemeClr val="lt1"/>
+          </a:fontRef>
+        </p:style>
+        <p:txBody>
+          <a:bodyPr rtlCol="0" anchor="ctr"/>
+          <a:lstStyle/>
+          <a:p>
+            <a:pPr algn="ctr"/>
+          </a:p>
+        </p:txBody>
+      </p:sp>
+      <p:sp>
+        <p:nvSpPr>
+          <p:cNvPr id="16" name="TextBox 15"/>
+          <p:cNvSpPr txBox="1"/>
+          <p:nvPr/>
+        </p:nvSpPr>
+        <p:spPr>
+          <a:xfrm>
+            <a:off x="8183880" y="3840480"/>
+            <a:ext cx="3154680" cy="731520"/>
+          </a:xfrm>
+          <a:prstGeom prst="rect">
+            <a:avLst/>
+          </a:prstGeom>
+          <a:noFill/>
+        </p:spPr>
+        <p:txBody>
+          <a:bodyPr wrap="square">
+            <a:spAutoFit/>
+          </a:bodyPr>
+          <a:lstStyle/>
+          <a:p>
+            <a:r>
+              <a:rPr sz="1250" b="1">
+                <a:solidFill>
+                  <a:srgbClr val="003B5C"/>
+                </a:solidFill>
+                <a:latin typeface="Calibri"/>
+              </a:rPr>
+              <a:t>Fase 3 — Execução</a:t>
+            </a:r>
+          </a:p>
+          <a:p>
+            <a:r>
+              <a:rPr sz="1400" b="1">
+                <a:solidFill>
+                  <a:srgbClr val="00A9E0"/>
+                </a:solidFill>
+                <a:latin typeface="Calibri"/>
+              </a:rPr>
+              <a:t>100% do provável</a:t>
+            </a:r>
+          </a:p>
+        </p:txBody>
+      </p:sp>
+      <p:sp>
+        <p:nvSpPr>
+          <p:cNvPr id="17" name="Rounded Rectangle 16"/>
+          <p:cNvSpPr/>
+          <p:nvPr/>
+        </p:nvSpPr>
+        <p:spPr>
+          <a:xfrm>
+            <a:off x="685800" y="5029200"/>
+            <a:ext cx="10835640" cy="914400"/>
+          </a:xfrm>
+          <a:prstGeom prst="roundRect">
+            <a:avLst/>
+          </a:prstGeom>
+          <a:solidFill>
+            <a:srgbClr val="FBE9E7"/>
+          </a:solidFill>
+          <a:ln>
+            <a:noFill/>
+          </a:ln>
+          <a:effectLst/>
+        </p:spPr>
+        <p:style>
+          <a:lnRef idx="1">
+            <a:schemeClr val="accent1"/>
+          </a:lnRef>
+          <a:fillRef idx="3">
+            <a:schemeClr val="accent1"/>
+          </a:fillRef>
+          <a:effectRef idx="2">
+            <a:schemeClr val="accent1"/>
+          </a:effectRef>
+          <a:fontRef idx="minor">
+            <a:schemeClr val="lt1"/>
+          </a:fontRef>
+        </p:style>
+        <p:txBody>
+          <a:bodyPr rtlCol="0" anchor="ctr"/>
+          <a:lstStyle/>
+          <a:p>
+            <a:pPr algn="ctr"/>
+          </a:p>
+        </p:txBody>
+      </p:sp>
+      <p:sp>
+        <p:nvSpPr>
+          <p:cNvPr id="18" name="TextBox 17"/>
+          <p:cNvSpPr txBox="1"/>
+          <p:nvPr/>
+        </p:nvSpPr>
+        <p:spPr>
+          <a:xfrm>
+            <a:off x="710184" y="5053584"/>
+            <a:ext cx="10786872" cy="865632"/>
+          </a:xfrm>
+          <a:prstGeom prst="rect">
+            <a:avLst/>
+          </a:prstGeom>
+          <a:noFill/>
+        </p:spPr>
+        <p:txBody>
+          <a:bodyPr wrap="square">
+            <a:spAutoFit/>
+          </a:bodyPr>
+          <a:lstStyle/>
+          <a:p>
+            <a:r>
+              <a:rPr sz="1300" b="1">
+                <a:solidFill>
+                  <a:srgbClr val="C0392B"/>
+                </a:solidFill>
+                <a:latin typeface="Calibri"/>
+              </a:rPr>
+              <a:t>⚠️  Sem Fase selecionada, o Accrual não é calculado</a:t>
+            </a:r>
+          </a:p>
+          <a:p>
+            <a:r>
+              <a:rPr sz="1150" b="0">
+                <a:solidFill>
+                  <a:srgbClr val="2D2926"/>
+                </a:solidFill>
+                <a:latin typeface="Calibri"/>
+              </a:rPr>
+              <a:t>  Nesse caso, preencha o campo manualmente na aba Inserção de Valores.</a:t>
+            </a:r>
+          </a:p>
+        </p:txBody>
+      </p:sp>
+      <p:sp>
+        <p:nvSpPr>
+          <p:cNvPr id="19" name="TextBox 18"/>
+          <p:cNvSpPr txBox="1"/>
+          <p:nvPr/>
+        </p:nvSpPr>
+        <p:spPr>
+          <a:xfrm>
+            <a:off x="502920" y="6473952"/>
+            <a:ext cx="7315200" cy="292608"/>
+          </a:xfrm>
+          <a:prstGeom prst="rect">
+            <a:avLst/>
+          </a:prstGeom>
+          <a:noFill/>
+        </p:spPr>
+        <p:txBody>
+          <a:bodyPr wrap="none">
+            <a:spAutoFit/>
+          </a:bodyPr>
+          <a:lstStyle/>
+          <a:p>
+            <a:r>
+              <a:rPr sz="900">
+                <a:solidFill>
+                  <a:srgbClr val="5F7E92"/>
+                </a:solidFill>
+                <a:latin typeface="Calibri"/>
+              </a:rPr>
+              <a:t>LAWgico — Comunicações Bridgestone · Peixoto &amp; Cury Advogados</a:t>
+            </a:r>
+          </a:p>
+        </p:txBody>
+      </p:sp>
+      <p:sp>
+        <p:nvSpPr>
+          <p:cNvPr id="20" name="TextBox 19"/>
+          <p:cNvSpPr txBox="1"/>
+          <p:nvPr/>
+        </p:nvSpPr>
+        <p:spPr>
+          <a:xfrm>
+            <a:off x="8991295" y="6473952"/>
+            <a:ext cx="2743200" cy="292608"/>
+          </a:xfrm>
+          <a:prstGeom prst="rect">
+            <a:avLst/>
+          </a:prstGeom>
+          <a:noFill/>
+        </p:spPr>
+        <p:txBody>
+          <a:bodyPr wrap="none">
+            <a:spAutoFit/>
+          </a:bodyPr>
+          <a:lstStyle/>
+          <a:p>
+            <a:pPr algn="r"/>
+            <a:r>
+              <a:rPr sz="900">
+                <a:solidFill>
+                  <a:srgbClr val="5F7E92"/>
+                </a:solidFill>
+                <a:latin typeface="Calibri"/>
+              </a:rPr>
+              <a:t>9 / 11</a:t>
+            </a:r>
+          </a:p>
+        </p:txBody>
+      </p:sp>
+    </p:spTree>
+  </p:cSld>
+  <p:clrMapOvr>
+    <a:masterClrMapping/>
+  </p:clrMapOvr>
+</p:sld>
+</file>
+
 <file path=ppt/slides/slide2.xml><?xml version="1.0" encoding="utf-8"?>
 <p:sld xmlns:a="http://schemas.openxmlformats.org/drawingml/2006/main" xmlns:p="http://schemas.openxmlformats.org/presentationml/2006/main" xmlns:r="http://schemas.openxmlformats.org/officeDocument/2006/relationships">
   <p:cSld>
@@ -3653,7 +5130,7 @@
                 </a:solidFill>
                 <a:latin typeface="Calibri"/>
               </a:rPr>
-              <a:t>5 abas, um único fluxo: preencher → e-mail pronto → histórico salvo</a:t>
+              <a:t>6 abas, um único fluxo: preencher → e-mail pronto → histórico salvo</a:t>
             </a:r>
           </a:p>
         </p:txBody>
@@ -3777,7 +5254,7 @@
         </p:nvSpPr>
         <p:spPr>
           <a:xfrm>
-            <a:off x="685800" y="2468880"/>
+            <a:off x="685800" y="2440200"/>
             <a:ext cx="457200" cy="457200"/>
           </a:xfrm>
           <a:prstGeom prst="ellipse">
@@ -3830,7 +5307,7 @@
         </p:nvSpPr>
         <p:spPr>
           <a:xfrm>
-            <a:off x="1307592" y="2414016"/>
+            <a:off x="1307592" y="2385336"/>
             <a:ext cx="5413248" cy="822960"/>
           </a:xfrm>
           <a:prstGeom prst="rect">
@@ -3888,7 +5365,7 @@
         </p:nvSpPr>
         <p:spPr>
           <a:xfrm>
-            <a:off x="685800" y="3337560"/>
+            <a:off x="685800" y="3280200"/>
             <a:ext cx="457200" cy="457200"/>
           </a:xfrm>
           <a:prstGeom prst="ellipse">
@@ -3941,7 +5418,7 @@
         </p:nvSpPr>
         <p:spPr>
           <a:xfrm>
-            <a:off x="1307592" y="3282696"/>
+            <a:off x="1307592" y="3225336"/>
             <a:ext cx="5413248" cy="822960"/>
           </a:xfrm>
           <a:prstGeom prst="rect">
@@ -3999,7 +5476,7 @@
         </p:nvSpPr>
         <p:spPr>
           <a:xfrm>
-            <a:off x="685800" y="4206240"/>
+            <a:off x="685800" y="4120200"/>
             <a:ext cx="457200" cy="457200"/>
           </a:xfrm>
           <a:prstGeom prst="ellipse">
@@ -4052,7 +5529,7 @@
         </p:nvSpPr>
         <p:spPr>
           <a:xfrm>
-            <a:off x="1307592" y="4151376"/>
+            <a:off x="1307592" y="4065336"/>
             <a:ext cx="5413248" cy="822960"/>
           </a:xfrm>
           <a:prstGeom prst="rect">
@@ -4110,7 +5587,7 @@
         </p:nvSpPr>
         <p:spPr>
           <a:xfrm>
-            <a:off x="685800" y="5074920"/>
+            <a:off x="685800" y="4960200"/>
             <a:ext cx="457200" cy="457200"/>
           </a:xfrm>
           <a:prstGeom prst="ellipse">
@@ -4163,7 +5640,7 @@
         </p:nvSpPr>
         <p:spPr>
           <a:xfrm>
-            <a:off x="1307592" y="5020056"/>
+            <a:off x="1307592" y="4905336"/>
             <a:ext cx="5413248" cy="822960"/>
           </a:xfrm>
           <a:prstGeom prst="rect">
@@ -4293,7 +5770,7 @@
                 </a:solidFill>
                 <a:latin typeface="Calibri"/>
               </a:rPr>
-              <a:t>Como funciona (vale pras 5 abas)</a:t>
+              <a:t>Como funciona (vale pras 5 abas com e-mail)</a:t>
             </a:r>
           </a:p>
           <a:p>
@@ -4401,6 +5878,17 @@
               <a:t>  Todo registro pode ser excluído (com confirmação) se for teste ou erro.</a:t>
             </a:r>
           </a:p>
+          <a:p>
+            <a:r>
+              <a:rPr sz="1200" b="0">
+                <a:solidFill>
+                  <a:srgbClr val="2D2926"/>
+                </a:solidFill>
+                <a:latin typeface="Calibri"/>
+              </a:rPr>
+              <a:t>  Lançamento IA foge da regra: não gera e-mail nem salva histórico — é só apoio pra montar valores.</a:t>
+            </a:r>
+          </a:p>
         </p:txBody>
       </p:sp>
       <p:sp>
@@ -4476,7 +5964,105 @@
                 </a:solidFill>
                 <a:latin typeface="Calibri"/>
               </a:rPr>
-              <a:t>2 / 9</a:t>
+              <a:t>2 / 11</a:t>
+            </a:r>
+          </a:p>
+        </p:txBody>
+      </p:sp>
+      <p:sp>
+        <p:nvSpPr>
+          <p:cNvPr id="19" name="Oval 18"/>
+          <p:cNvSpPr/>
+          <p:nvPr/>
+        </p:nvSpPr>
+        <p:spPr>
+          <a:xfrm>
+            <a:off x="685800" y="5800200"/>
+            <a:ext cx="457200" cy="457200"/>
+          </a:xfrm>
+          <a:prstGeom prst="ellipse">
+            <a:avLst/>
+          </a:prstGeom>
+          <a:solidFill>
+            <a:srgbClr val="00A9E0"/>
+          </a:solidFill>
+          <a:ln>
+            <a:noFill/>
+          </a:ln>
+          <a:effectLst/>
+        </p:spPr>
+        <p:style>
+          <a:lnRef idx="1">
+            <a:schemeClr val="accent1"/>
+          </a:lnRef>
+          <a:fillRef idx="3">
+            <a:schemeClr val="accent1"/>
+          </a:fillRef>
+          <a:effectRef idx="2">
+            <a:schemeClr val="accent1"/>
+          </a:effectRef>
+          <a:fontRef idx="minor">
+            <a:schemeClr val="lt1"/>
+          </a:fontRef>
+        </p:style>
+        <p:txBody>
+          <a:bodyPr rtlCol="0" anchor="ctr"/>
+          <a:lstStyle/>
+          <a:p>
+            <a:pPr algn="ctr"/>
+            <a:r>
+              <a:rPr sz="1700" b="1">
+                <a:solidFill>
+                  <a:srgbClr val="FFFFFF"/>
+                </a:solidFill>
+                <a:latin typeface="Calibri"/>
+              </a:rPr>
+              <a:t>🤖</a:t>
+            </a:r>
+          </a:p>
+        </p:txBody>
+      </p:sp>
+      <p:sp>
+        <p:nvSpPr>
+          <p:cNvPr id="20" name="TextBox 19"/>
+          <p:cNvSpPr txBox="1"/>
+          <p:nvPr/>
+        </p:nvSpPr>
+        <p:spPr>
+          <a:xfrm>
+            <a:off x="1307592" y="5745336"/>
+            <a:ext cx="5413248" cy="822960"/>
+          </a:xfrm>
+          <a:prstGeom prst="rect">
+            <a:avLst/>
+          </a:prstGeom>
+          <a:noFill/>
+        </p:spPr>
+        <p:txBody>
+          <a:bodyPr wrap="square">
+            <a:spAutoFit/>
+          </a:bodyPr>
+          <a:lstStyle/>
+          <a:p>
+            <a:r>
+              <a:rPr sz="1400" b="1">
+                <a:solidFill>
+                  <a:srgbClr val="003B5C"/>
+                </a:solidFill>
+                <a:latin typeface="Calibri"/>
+              </a:rPr>
+              <a:t>Lançamento IA</a:t>
+            </a:r>
+          </a:p>
+          <a:p>
+            <a:r>
+              <a:rPr sz="1150" b="0">
+                <a:solidFill>
+                  <a:srgbClr val="2D2926"/>
+                </a:solidFill>
+                <a:latin typeface="Calibri"/>
+              </a:rPr>
+              <a:t>Extrai valores de PDF/XLSX pra alimentar a Inserção de Valores</a:t>
             </a:r>
           </a:p>
         </p:txBody>
@@ -5280,7 +6866,7 @@
                 </a:solidFill>
                 <a:latin typeface="Calibri"/>
               </a:rPr>
-              <a:t>3 / 9</a:t>
+              <a:t>3 / 11</a:t>
             </a:r>
           </a:p>
         </p:txBody>
@@ -5898,7 +7484,7 @@
                 </a:solidFill>
                 <a:latin typeface="Calibri"/>
               </a:rPr>
-              <a:t>4 / 9</a:t>
+              <a:t>4 / 11</a:t>
             </a:r>
           </a:p>
         </p:txBody>
@@ -6822,7 +8408,7 @@
                 </a:solidFill>
                 <a:latin typeface="Calibri"/>
               </a:rPr>
-              <a:t>5 / 9</a:t>
+              <a:t>5 / 11</a:t>
             </a:r>
           </a:p>
         </p:txBody>
@@ -7469,7 +9055,7 @@
                 </a:solidFill>
                 <a:latin typeface="Calibri"/>
               </a:rPr>
-              <a:t>6 / 9</a:t>
+              <a:t>6 / 11</a:t>
             </a:r>
           </a:p>
         </p:txBody>
@@ -8431,7 +10017,7 @@
                 </a:solidFill>
                 <a:latin typeface="Calibri"/>
               </a:rPr>
-              <a:t>7 / 9</a:t>
+              <a:t>7 / 11</a:t>
             </a:r>
           </a:p>
         </p:txBody>
@@ -8767,7 +10353,7 @@
                 </a:solidFill>
                 <a:latin typeface="Calibri"/>
               </a:rPr>
-              <a:t>8 / 9</a:t>
+              <a:t>10 / 11</a:t>
             </a:r>
           </a:p>
         </p:txBody>
